--- a/docs/cursor-api-presentation.pptx
+++ b/docs/cursor-api-presentation.pptx
@@ -611,7 +611,7 @@
             <a:r>
               <a:rPr lang="en-US" dirty="0"/>
               <a:t>Первый запрос — без курсора. Клиент задаёт размер страницы и, если нужно, сортировку.
-В нашем демо это GET /articles с sort=author, order=ASC и size=2. К базе уходит ORDER BY по полю сортировки и по id, плюс LIMIT.</a:t>
+В нашем демо это GET /articles с sort_by=author, sort_order=ASC и size=2. К базе уходит ORDER BY по полю сортировки и по id, плюс LIMIT.</a:t>
             </a:r>
             <a:endParaRPr lang="en-US" dirty="0"/>
           </a:p>
@@ -971,7 +971,7 @@
 - n и v — имя и значение поля сортировки,
 - o — порядок ASC или DESC.
 Клиенту это разбирать не обязательно: для него курсор — просто строка из прошлого ответа.
-В ответе на вторую страницу уже могут появиться и prev, и next.</a:t>
+В ответе на вторую страницу уже могут появиться и prev, и next курсоры.</a:t>
             </a:r>
             <a:endParaRPr lang="en-US" dirty="0"/>
           </a:p>
@@ -1239,8 +1239,9 @@
             <a:r>
               <a:rPr lang="en-US" dirty="0"/>
               <a:t>Удобный приём: упаковать параметры запроса в сам курсор.
-После первого запроса клиенту достаточно передавать size и cursor (на выбор - next или prev). Sort и order уже внутри курсора — их не нужно повторять в query string, и нельзя случайно пересортировать середину ленты другим полем.
-В нашем проекте это жёстко: если курсор уже есть, sort в query передавать нельзя — либо в параметре, либо внутри курсора.</a:t>
+После первого запроса клиенту достаточно передавать size и cursor (на выбор - next или prev).
+sort_by и sort_order уже внутри курсора — их не нужно повторять в query string, и нельзя случайно пересортировать середину ленты другим полем.
+В нашем проекте это жёстко: если курсор уже есть, sort_by в query передавать нельзя — либо в параметре, либо внутри курсора.</a:t>
             </a:r>
             <a:endParaRPr lang="en-US" dirty="0"/>
           </a:p>
@@ -1330,7 +1331,7 @@
               <a:rPr lang="en-US" dirty="0"/>
               <a:t>Коротко про демо client-cursor.
 Это Spring Boot REST на порту 9080. Листинг статей: GET /articles, ответ data, prev, next.
-Первый запрос: curl с size=2 и sort=author. Во втором — тот же size и cursor из next или prev.</a:t>
+Первый запрос: curl с size=2 и sort_by=author. Во втором — тот же size и cursor из next или prev.</a:t>
             </a:r>
             <a:endParaRPr lang="en-US" dirty="0"/>
           </a:p>
@@ -1418,7 +1419,13 @@
           <a:p>
             <a:r>
               <a:rPr lang="en-US" dirty="0"/>
-              <a:t>Правила, которые полезно помнить: sort только на старте; size можно менять; next становится null, когда данных меньше size; prev равен null, если в запросе нет cursor или data пустой. Sort-поля ограничены whitelist: title, author, summary. Sequential id здесь — обычный generated Article.id. Подробности и Swagger — по ссылкам в описании.</a:t>
+              <a:t>Правила, которые полезно помнить:
+- sort_by и sort_order только на старте;
+- size можно менять; next становится null на последней странице;
+- prev равен null на первой странице — в том числе когда пришли туда шагом назад.
+- Sort-поля ограничены whitelist: title, author, summary.
+- Sequential id здесь — обычный generated Article.id.
+- Подробности и Swagger — по ссылкам в описании.</a:t>
             </a:r>
             <a:endParaRPr lang="en-US" dirty="0"/>
           </a:p>
@@ -1595,7 +1602,8 @@
             <a:r>
               <a:rPr lang="en-US" dirty="0"/>
               <a:t>Подведём итог.
-Cursor API — это пагинация через позицию: стабильнее и предсказуемее offset на больших и «живых» датасетах. Цена — другой UX: удобные переходы по next или prev курсору, а не произвольный прыжок на "страницу номер сто".
+Cursor API — это пагинация через позицию: стабильнее и предсказуемее offset на больших и «живых» датасетах.
+Цена — другой UX: удобные переходы по next или prev курсору, а не произвольный прыжок на "страницу номер сто".
 Если хотите посмотреть рабочий пример — ссылка на репозиторий с кодом проекта, где есть подробный README с curl-командами, находится в описании к ролику.</a:t>
             </a:r>
             <a:endParaRPr lang="en-US" dirty="0"/>
@@ -1861,7 +1869,7 @@
           <a:p>
             <a:r>
               <a:rPr lang="en-US" dirty="0"/>
-              <a:t>Интуиция такая: «просто прыгни на нужное место». Но для многих СУБД это выглядит иначе: нужно прочитать и отсортировать строки вплоть до OFFSET плюс LIMIT, а потом отбросить первые OFFSET. То есть при глубокой странице вы платите за работу, результат которой клиенту даже не отдаёте.</a:t>
+              <a:t>Интуиция такая: «просто прыгни на нужное место». Но для многих СУБД это выглядит иначе: нужно прочитать и отсортировать строки вплоть до OFFSET плюс LIMIT, а потом отбросить первые OFFSET. То есть при дальней странице вы платите за работу, результат которой клиенту даже не отдаёте.</a:t>
             </a:r>
             <a:endParaRPr lang="en-US" dirty="0"/>
           </a:p>

--- a/docs/cursor-api-presentation.pptx
+++ b/docs/cursor-api-presentation.pptx
@@ -1060,7 +1060,8 @@
             <a:r>
               <a:rPr lang="en-US" dirty="0"/>
               <a:t>Обратный курсор — зеркальная история.
-Клиент передаёт prev из прошлого ответа. Условие «меньше»: либо тот же author и меньший id, либо строго меньший author. В БД сортировка по убыванию, LIMIT тот же. Затем результат разворачиваем — клиент получает записи в ожидаемом порядке.</a:t>
+Клиент передаёт prev из прошлого ответа. Условие «меньше»: либо тот же author и меньший id, либо строго меньший author. Сортировка в БД — по убыванию, LIMIT тот же.
+Почему DESC: база идёт к более ранним записям и первой находит ближайшего соседа. Порядок для клиента из-за этого окажется перевёрнутым — на следующем слайде покажу, что с этим делать.</a:t>
             </a:r>
             <a:endParaRPr lang="en-US" dirty="0"/>
           </a:p>
@@ -1148,9 +1149,9 @@
           <a:p>
             <a:r>
               <a:rPr lang="en-US" dirty="0"/>
-              <a:t>Обратный курсор — зеркальная история.
-Условие «меньше», сортировка в запросе к БД — по убыванию, LIMIT тот же. Но клиенту мы отдаём список в ожидаемом порядке чтения вперёд, поэтому после выборки результат разворачиваем.
-prev строится от первой записи текущей страницы и помечается как backward — параметр f равен false. Так клиент ходит туда-сюда относительно текущей позиции, не считая номера страниц.</a:t>
+              <a:t>Жёлтая строка — первая запись текущей страницы: от неё построен prev. Идём назад и должны получить John с id=37 и John с id=38.
+База при DESC сначала находит ближайшего соседа: 38, потом 37. Клиенту такой порядок не подходит — он ждёт тот же, что при чтении вперёд. Поэтому список разворачиваем: 37, затем 38.
+В курсоре f равно false. Клиент ходит туда-сюда относительно позиции, не считая номера страниц.</a:t>
             </a:r>
             <a:endParaRPr lang="en-US" dirty="0"/>
           </a:p>
@@ -1604,7 +1605,7 @@
               <a:t>Подведём итог.
 Cursor API — это пагинация через позицию: стабильнее и предсказуемее offset на больших и «живых» датасетах.
 Цена — другой UX: удобные переходы по next или prev курсору, а не произвольный прыжок на "страницу номер сто".
-Если хотите посмотреть рабочий пример — ссылка на репозиторий с кодом проекта, где есть подробный README с curl-командами, находится в описании к ролику.</a:t>
+Если хотите посмотреть рабочий пример - ссылка на репозиторий с кодом проекта находится в описании к ролику.</a:t>
             </a:r>
             <a:endParaRPr lang="en-US" dirty="0"/>
           </a:p>

--- a/docs/cursor-api-presentation.pptx
+++ b/docs/cursor-api-presentation.pptx
@@ -1425,8 +1425,7 @@
 - size можно менять; next становится null на последней странице;
 - prev равен null на первой странице — в том числе когда пришли туда шагом назад.
 - Sort-поля ограничены whitelist: title, author, summary.
-- Sequential id здесь — обычный generated Article.id.
-- Подробности и Swagger — по ссылкам в описании.</a:t>
+- Sequential id здесь — обычный generated Article.id.</a:t>
             </a:r>
             <a:endParaRPr lang="en-US" dirty="0"/>
           </a:p>
@@ -1604,8 +1603,7 @@
               <a:rPr lang="en-US" dirty="0"/>
               <a:t>Подведём итог.
 Cursor API — это пагинация через позицию: стабильнее и предсказуемее offset на больших и «живых» датасетах.
-Цена — другой UX: удобные переходы по next или prev курсору, а не произвольный прыжок на "страницу номер сто".
-Если хотите посмотреть рабочий пример - ссылка на репозиторий с кодом проекта находится в описании к ролику.</a:t>
+Цена — другой UX: удобные переходы по next или prev курсору, а не произвольный прыжок на "страницу номер сто".</a:t>
             </a:r>
             <a:endParaRPr lang="en-US" dirty="0"/>
           </a:p>
